--- a/apps/resources/bundled_files/5-klass-venn-diagrammalary-sabak.pptx
+++ b/apps/resources/bundled_files/5-klass-venn-diagrammalary-sabak.pptx
@@ -5196,7 +5196,7 @@
                 </a:solidFill>
                 <a:latin typeface="PT Sans"/>
               </a:rPr>
-              <a:t>5-класс · Математика</a:t>
+              <a:t/>
             </a:r>
           </a:p>
         </p:txBody>
@@ -5688,7 +5688,7 @@
                 </a:solidFill>
                 <a:latin typeface="PT Sans"/>
               </a:rPr>
-              <a:t>5-класс ›</a:t>
+              <a:t/>
             </a:r>
           </a:p>
           <a:p>
@@ -7199,7 +7199,7 @@
                 </a:solidFill>
                 <a:latin typeface="PT Sans"/>
               </a:rPr>
-              <a:t>5-класс ›</a:t>
+              <a:t/>
             </a:r>
           </a:p>
           <a:p>
@@ -9563,7 +9563,7 @@
                 </a:solidFill>
                 <a:latin typeface="PT Sans"/>
               </a:rPr>
-              <a:t>5-класс ›</a:t>
+              <a:t/>
             </a:r>
           </a:p>
           <a:p>
@@ -11506,7 +11506,7 @@
                 </a:solidFill>
                 <a:latin typeface="PT Sans"/>
               </a:rPr>
-              <a:t>5-класс ›</a:t>
+              <a:t/>
             </a:r>
           </a:p>
           <a:p>
@@ -13089,7 +13089,7 @@
                 </a:solidFill>
                 <a:latin typeface="PT Sans"/>
               </a:rPr>
-              <a:t>5-класс ›</a:t>
+              <a:t/>
             </a:r>
           </a:p>
           <a:p>
@@ -14127,7 +14127,7 @@
                 </a:solidFill>
                 <a:latin typeface="PT Sans"/>
               </a:rPr>
-              <a:t>5-класс ›</a:t>
+              <a:t/>
             </a:r>
           </a:p>
           <a:p>
@@ -15819,7 +15819,7 @@
                 </a:solidFill>
                 <a:latin typeface="PT Sans"/>
               </a:rPr>
-              <a:t>5-класс ›</a:t>
+              <a:t/>
             </a:r>
           </a:p>
           <a:p>
@@ -17368,7 +17368,7 @@
                 </a:solidFill>
                 <a:latin typeface="PT Sans"/>
               </a:rPr>
-              <a:t>5-класс ›</a:t>
+              <a:t/>
             </a:r>
           </a:p>
           <a:p>
@@ -18452,7 +18452,7 @@
                 </a:solidFill>
                 <a:latin typeface="PT Sans"/>
               </a:rPr>
-              <a:t>5-класс ›</a:t>
+              <a:t/>
             </a:r>
           </a:p>
           <a:p>
@@ -19982,7 +19982,7 @@
                 </a:solidFill>
                 <a:latin typeface="PT Sans"/>
               </a:rPr>
-              <a:t>5-класс ›</a:t>
+              <a:t/>
             </a:r>
           </a:p>
           <a:p>
@@ -21874,7 +21874,7 @@
                 </a:solidFill>
                 <a:latin typeface="PT Sans"/>
               </a:rPr>
-              <a:t>5-класс ›</a:t>
+              <a:t/>
             </a:r>
           </a:p>
           <a:p>
@@ -23151,7 +23151,7 @@
                 </a:solidFill>
                 <a:latin typeface="PT Sans"/>
               </a:rPr>
-              <a:t>5-класс ›</a:t>
+              <a:t/>
             </a:r>
           </a:p>
           <a:p>
@@ -24579,7 +24579,7 @@
                 </a:solidFill>
                 <a:latin typeface="PT Sans"/>
               </a:rPr>
-              <a:t>5-класс ›</a:t>
+              <a:t/>
             </a:r>
           </a:p>
           <a:p>
@@ -26035,7 +26035,7 @@
                 </a:solidFill>
                 <a:latin typeface="PT Sans"/>
               </a:rPr>
-              <a:t>5-класс ›</a:t>
+              <a:t/>
             </a:r>
           </a:p>
           <a:p>
@@ -27743,7 +27743,7 @@
                 </a:solidFill>
                 <a:latin typeface="PT Sans"/>
               </a:rPr>
-              <a:t>5-класс ›</a:t>
+              <a:t/>
             </a:r>
           </a:p>
           <a:p>
@@ -28543,7 +28543,7 @@
                 </a:solidFill>
                 <a:latin typeface="PT Sans"/>
               </a:rPr>
-              <a:t>5-класс ›</a:t>
+              <a:t/>
             </a:r>
           </a:p>
           <a:p>
@@ -29384,7 +29384,7 @@
                 </a:solidFill>
                 <a:latin typeface="PT Sans"/>
               </a:rPr>
-              <a:t>5-класс ›</a:t>
+              <a:t/>
             </a:r>
           </a:p>
           <a:p>
@@ -30333,7 +30333,7 @@
                 </a:solidFill>
                 <a:latin typeface="PT Sans"/>
               </a:rPr>
-              <a:t>5-класс ›</a:t>
+              <a:t/>
             </a:r>
           </a:p>
           <a:p>
@@ -31787,7 +31787,7 @@
                 </a:solidFill>
                 <a:latin typeface="PT Sans"/>
               </a:rPr>
-              <a:t>5-класс ›</a:t>
+              <a:t/>
             </a:r>
           </a:p>
           <a:p>
@@ -32533,7 +32533,7 @@
                 </a:solidFill>
                 <a:latin typeface="PT Sans"/>
               </a:rPr>
-              <a:t>5-класс ›</a:t>
+              <a:t/>
             </a:r>
           </a:p>
           <a:p>
@@ -33341,7 +33341,7 @@
                 </a:solidFill>
                 <a:latin typeface="PT Sans"/>
               </a:rPr>
-              <a:t>5-класс ›</a:t>
+              <a:t/>
             </a:r>
           </a:p>
           <a:p>
@@ -34532,7 +34532,7 @@
                 </a:solidFill>
                 <a:latin typeface="PT Sans"/>
               </a:rPr>
-              <a:t>5-класс ›</a:t>
+              <a:t/>
             </a:r>
           </a:p>
           <a:p>
@@ -35711,7 +35711,7 @@
                 </a:solidFill>
                 <a:latin typeface="PT Sans"/>
               </a:rPr>
-              <a:t>5-класс ›</a:t>
+              <a:t/>
             </a:r>
           </a:p>
           <a:p>
@@ -35892,7 +35892,7 @@
                 </a:solidFill>
                 <a:latin typeface="PT Sans"/>
               </a:rPr>
-              <a:t>2-класс</a:t>
+              <a:t/>
             </a:r>
           </a:p>
         </p:txBody>
@@ -36072,7 +36072,7 @@
                 </a:solidFill>
                 <a:latin typeface="PT Sans"/>
               </a:rPr>
-              <a:t>5-класс</a:t>
+              <a:t/>
             </a:r>
           </a:p>
         </p:txBody>
@@ -36308,7 +36308,7 @@
                 </a:solidFill>
                 <a:latin typeface="PT Sans"/>
               </a:rPr>
-              <a:t>6-класс</a:t>
+              <a:t/>
             </a:r>
           </a:p>
         </p:txBody>
@@ -36489,7 +36489,7 @@
                 </a:solidFill>
                 <a:latin typeface="PT Sans"/>
               </a:rPr>
-              <a:t>7-класс</a:t>
+              <a:t/>
             </a:r>
           </a:p>
         </p:txBody>
@@ -36909,7 +36909,7 @@
                 </a:solidFill>
                 <a:latin typeface="PT Sans"/>
               </a:rPr>
-              <a:t>5-класс ›</a:t>
+              <a:t/>
             </a:r>
           </a:p>
           <a:p>
@@ -38057,7 +38057,7 @@
                 </a:solidFill>
                 <a:latin typeface="PT Sans"/>
               </a:rPr>
-              <a:t>5-класс ›</a:t>
+              <a:t/>
             </a:r>
           </a:p>
           <a:p>

--- a/apps/resources/bundled_files/5-klass-venn-diagrammalary-sabak.pptx
+++ b/apps/resources/bundled_files/5-klass-venn-diagrammalary-sabak.pptx
@@ -1582,7 +1582,7 @@
           <a:lstStyle/>
           <a:p>
             <a:r>
-              <a:t>Ой жүгүртүү маданияты (Wenxi Lee, 2.6).</a:t>
+              <a:t>Ой жүгүртүү маданияты (Wenxi Lee, 2,6).</a:t>
             </a:r>
           </a:p>
         </p:txBody>
